--- a/CKDSurveillance/PPT/Q806.pptx
+++ b/CKDSurveillance/PPT/Q806.pptx
@@ -138,8 +138,280 @@
         <c:grouping val="standard"/>
         <c:varyColors val="0"/>
         <c:ser>
+          <c:idx val="1"/>
+          <c:order val="0"/>
+          <c:tx>
+            <c:strRef>
+              <c:f>Diabetes!$E$30</c:f>
+              <c:strCache>
+                <c:ptCount val="1"/>
+                <c:pt idx="0">
+                  <c:v>With CKD</c:v>
+                </c:pt>
+              </c:strCache>
+            </c:strRef>
+          </c:tx>
+          <c:spPr>
+            <a:ln w="44450" cap="rnd">
+              <a:solidFill>
+                <a:schemeClr val="accent2"/>
+              </a:solidFill>
+              <a:round/>
+            </a:ln>
+            <a:effectLst/>
+          </c:spPr>
+          <c:marker>
+            <c:symbol val="circle"/>
+            <c:size val="5"/>
+            <c:spPr>
+              <a:solidFill>
+                <a:schemeClr val="accent2"/>
+              </a:solidFill>
+              <a:ln w="9525">
+                <a:solidFill>
+                  <a:schemeClr val="accent2"/>
+                </a:solidFill>
+              </a:ln>
+              <a:effectLst/>
+            </c:spPr>
+          </c:marker>
+          <c:errBars>
+            <c:errDir val="y"/>
+            <c:errBarType val="both"/>
+            <c:errValType val="cust"/>
+            <c:noEndCap val="0"/>
+            <c:plus>
+              <c:numRef>
+                <c:f>Diabetes!$J$14:$J$18</c:f>
+                <c:numCache>
+                  <c:formatCode>General</c:formatCode>
+                  <c:ptCount val="5"/>
+                  <c:pt idx="0">
+                    <c:v>6.0632600000000009E-3</c:v>
+                  </c:pt>
+                  <c:pt idx="1">
+                    <c:v>8.3982799999999941E-3</c:v>
+                  </c:pt>
+                  <c:pt idx="2">
+                    <c:v>7.2020200000000034E-3</c:v>
+                  </c:pt>
+                  <c:pt idx="3">
+                    <c:v>9.6356600000000042E-3</c:v>
+                  </c:pt>
+                  <c:pt idx="4">
+                    <c:v>6.0391899999999998E-3</c:v>
+                  </c:pt>
+                </c:numCache>
+              </c:numRef>
+            </c:plus>
+            <c:minus>
+              <c:numRef>
+                <c:f>Diabetes!$K$14:$K$18</c:f>
+                <c:numCache>
+                  <c:formatCode>General</c:formatCode>
+                  <c:ptCount val="5"/>
+                  <c:pt idx="0">
+                    <c:v>6.062839999999993E-3</c:v>
+                  </c:pt>
+                  <c:pt idx="1">
+                    <c:v>8.3986100000000008E-3</c:v>
+                  </c:pt>
+                  <c:pt idx="2">
+                    <c:v>7.2022699999999967E-3</c:v>
+                  </c:pt>
+                  <c:pt idx="3">
+                    <c:v>9.636409999999998E-3</c:v>
+                  </c:pt>
+                  <c:pt idx="4">
+                    <c:v>6.038700000000008E-3</c:v>
+                  </c:pt>
+                </c:numCache>
+              </c:numRef>
+            </c:minus>
+            <c:spPr>
+              <a:noFill/>
+              <a:ln w="9525" cap="flat" cmpd="sng" algn="ctr">
+                <a:solidFill>
+                  <a:schemeClr val="tx1">
+                    <a:lumMod val="65000"/>
+                    <a:lumOff val="35000"/>
+                  </a:schemeClr>
+                </a:solidFill>
+                <a:round/>
+              </a:ln>
+              <a:effectLst/>
+            </c:spPr>
+          </c:errBars>
+          <c:val>
+            <c:numRef>
+              <c:f>Diabetes!$E$31:$E$35</c:f>
+              <c:numCache>
+                <c:formatCode>0.0%</c:formatCode>
+                <c:ptCount val="5"/>
+                <c:pt idx="0">
+                  <c:v>0.27799400000000002</c:v>
+                </c:pt>
+                <c:pt idx="1">
+                  <c:v>0.29378399999999999</c:v>
+                </c:pt>
+                <c:pt idx="2">
+                  <c:v>0.309083</c:v>
+                </c:pt>
+                <c:pt idx="3">
+                  <c:v>0.31071300000000002</c:v>
+                </c:pt>
+                <c:pt idx="4">
+                  <c:v>0.37396800000000002</c:v>
+                </c:pt>
+              </c:numCache>
+            </c:numRef>
+          </c:val>
+          <c:smooth val="0"/>
+          <c:extLst>
+            <c:ext xmlns:c16="http://schemas.microsoft.com/office/drawing/2014/chart" uri="{C3380CC4-5D6E-409C-BE32-E72D297353CC}">
+              <c16:uniqueId val="{00000001-C217-44D5-9E1B-0E9E99A777F6}"/>
+            </c:ext>
+          </c:extLst>
+        </c:ser>
+        <c:ser>
+          <c:idx val="2"/>
+          <c:order val="1"/>
+          <c:tx>
+            <c:strRef>
+              <c:f>Diabetes!$D$30</c:f>
+              <c:strCache>
+                <c:ptCount val="1"/>
+                <c:pt idx="0">
+                  <c:v>Without CKD</c:v>
+                </c:pt>
+              </c:strCache>
+            </c:strRef>
+          </c:tx>
+          <c:spPr>
+            <a:ln w="44450" cap="rnd">
+              <a:solidFill>
+                <a:schemeClr val="accent3"/>
+              </a:solidFill>
+              <a:round/>
+            </a:ln>
+            <a:effectLst/>
+          </c:spPr>
+          <c:marker>
+            <c:symbol val="circle"/>
+            <c:size val="5"/>
+            <c:spPr>
+              <a:solidFill>
+                <a:schemeClr val="accent3"/>
+              </a:solidFill>
+              <a:ln w="9525">
+                <a:solidFill>
+                  <a:schemeClr val="accent3"/>
+                </a:solidFill>
+              </a:ln>
+              <a:effectLst/>
+            </c:spPr>
+          </c:marker>
+          <c:errBars>
+            <c:errDir val="y"/>
+            <c:errBarType val="both"/>
+            <c:errValType val="cust"/>
+            <c:noEndCap val="0"/>
+            <c:plus>
+              <c:numRef>
+                <c:f>Diabetes!$J$19:$J$23</c:f>
+                <c:numCache>
+                  <c:formatCode>General</c:formatCode>
+                  <c:ptCount val="5"/>
+                  <c:pt idx="0">
+                    <c:v>3.7717210000000029E-2</c:v>
+                  </c:pt>
+                  <c:pt idx="1">
+                    <c:v>3.4722809999999993E-2</c:v>
+                  </c:pt>
+                  <c:pt idx="2">
+                    <c:v>2.7001529999999996E-2</c:v>
+                  </c:pt>
+                  <c:pt idx="3">
+                    <c:v>3.0475780000000008E-2</c:v>
+                  </c:pt>
+                  <c:pt idx="4">
+                    <c:v>3.0032230000000049E-2</c:v>
+                  </c:pt>
+                </c:numCache>
+              </c:numRef>
+            </c:plus>
+            <c:minus>
+              <c:numRef>
+                <c:f>Diabetes!$K$19:$K$23</c:f>
+                <c:numCache>
+                  <c:formatCode>General</c:formatCode>
+                  <c:ptCount val="5"/>
+                  <c:pt idx="0">
+                    <c:v>3.7717489999999965E-2</c:v>
+                  </c:pt>
+                  <c:pt idx="1">
+                    <c:v>3.4721920000000017E-2</c:v>
+                  </c:pt>
+                  <c:pt idx="2">
+                    <c:v>2.7000880000000005E-2</c:v>
+                  </c:pt>
+                  <c:pt idx="3">
+                    <c:v>3.0475780000000008E-2</c:v>
+                  </c:pt>
+                  <c:pt idx="4">
+                    <c:v>3.0032179999999964E-2</c:v>
+                  </c:pt>
+                </c:numCache>
+              </c:numRef>
+            </c:minus>
+            <c:spPr>
+              <a:noFill/>
+              <a:ln w="9525" cap="flat" cmpd="sng" algn="ctr">
+                <a:solidFill>
+                  <a:schemeClr val="tx1">
+                    <a:lumMod val="65000"/>
+                    <a:lumOff val="35000"/>
+                  </a:schemeClr>
+                </a:solidFill>
+                <a:round/>
+              </a:ln>
+              <a:effectLst/>
+            </c:spPr>
+          </c:errBars>
+          <c:val>
+            <c:numRef>
+              <c:f>Diabetes!$D$31:$D$35</c:f>
+              <c:numCache>
+                <c:formatCode>0.0%</c:formatCode>
+                <c:ptCount val="5"/>
+                <c:pt idx="0">
+                  <c:v>6.1162000000000001E-2</c:v>
+                </c:pt>
+                <c:pt idx="1">
+                  <c:v>7.3346999999999996E-2</c:v>
+                </c:pt>
+                <c:pt idx="2">
+                  <c:v>8.3376000000000006E-2</c:v>
+                </c:pt>
+                <c:pt idx="3">
+                  <c:v>9.6495999999999998E-2</c:v>
+                </c:pt>
+                <c:pt idx="4">
+                  <c:v>0.102933</c:v>
+                </c:pt>
+              </c:numCache>
+            </c:numRef>
+          </c:val>
+          <c:smooth val="0"/>
+          <c:extLst>
+            <c:ext xmlns:c16="http://schemas.microsoft.com/office/drawing/2014/chart" uri="{C3380CC4-5D6E-409C-BE32-E72D297353CC}">
+              <c16:uniqueId val="{00000002-C217-44D5-9E1B-0E9E99A777F6}"/>
+            </c:ext>
+          </c:extLst>
+        </c:ser>
+        <c:ser>
           <c:idx val="0"/>
-          <c:order val="0"/>
+          <c:order val="2"/>
           <c:tx>
             <c:strRef>
               <c:f>Diabetes!$C$30</c:f>
@@ -294,278 +566,6 @@
           <c:extLst>
             <c:ext xmlns:c16="http://schemas.microsoft.com/office/drawing/2014/chart" uri="{C3380CC4-5D6E-409C-BE32-E72D297353CC}">
               <c16:uniqueId val="{00000000-C217-44D5-9E1B-0E9E99A777F6}"/>
-            </c:ext>
-          </c:extLst>
-        </c:ser>
-        <c:ser>
-          <c:idx val="1"/>
-          <c:order val="1"/>
-          <c:tx>
-            <c:strRef>
-              <c:f>Diabetes!$E$30</c:f>
-              <c:strCache>
-                <c:ptCount val="1"/>
-                <c:pt idx="0">
-                  <c:v>CKD</c:v>
-                </c:pt>
-              </c:strCache>
-            </c:strRef>
-          </c:tx>
-          <c:spPr>
-            <a:ln w="44450" cap="rnd">
-              <a:solidFill>
-                <a:schemeClr val="accent2"/>
-              </a:solidFill>
-              <a:round/>
-            </a:ln>
-            <a:effectLst/>
-          </c:spPr>
-          <c:marker>
-            <c:symbol val="circle"/>
-            <c:size val="5"/>
-            <c:spPr>
-              <a:solidFill>
-                <a:schemeClr val="accent2"/>
-              </a:solidFill>
-              <a:ln w="9525">
-                <a:solidFill>
-                  <a:schemeClr val="accent2"/>
-                </a:solidFill>
-              </a:ln>
-              <a:effectLst/>
-            </c:spPr>
-          </c:marker>
-          <c:errBars>
-            <c:errDir val="y"/>
-            <c:errBarType val="both"/>
-            <c:errValType val="cust"/>
-            <c:noEndCap val="0"/>
-            <c:plus>
-              <c:numRef>
-                <c:f>Diabetes!$J$14:$J$18</c:f>
-                <c:numCache>
-                  <c:formatCode>General</c:formatCode>
-                  <c:ptCount val="5"/>
-                  <c:pt idx="0">
-                    <c:v>6.0632600000000009E-3</c:v>
-                  </c:pt>
-                  <c:pt idx="1">
-                    <c:v>8.3982799999999941E-3</c:v>
-                  </c:pt>
-                  <c:pt idx="2">
-                    <c:v>7.2020200000000034E-3</c:v>
-                  </c:pt>
-                  <c:pt idx="3">
-                    <c:v>9.6356600000000042E-3</c:v>
-                  </c:pt>
-                  <c:pt idx="4">
-                    <c:v>6.0391899999999998E-3</c:v>
-                  </c:pt>
-                </c:numCache>
-              </c:numRef>
-            </c:plus>
-            <c:minus>
-              <c:numRef>
-                <c:f>Diabetes!$K$14:$K$18</c:f>
-                <c:numCache>
-                  <c:formatCode>General</c:formatCode>
-                  <c:ptCount val="5"/>
-                  <c:pt idx="0">
-                    <c:v>6.062839999999993E-3</c:v>
-                  </c:pt>
-                  <c:pt idx="1">
-                    <c:v>8.3986100000000008E-3</c:v>
-                  </c:pt>
-                  <c:pt idx="2">
-                    <c:v>7.2022699999999967E-3</c:v>
-                  </c:pt>
-                  <c:pt idx="3">
-                    <c:v>9.636409999999998E-3</c:v>
-                  </c:pt>
-                  <c:pt idx="4">
-                    <c:v>6.038700000000008E-3</c:v>
-                  </c:pt>
-                </c:numCache>
-              </c:numRef>
-            </c:minus>
-            <c:spPr>
-              <a:noFill/>
-              <a:ln w="9525" cap="flat" cmpd="sng" algn="ctr">
-                <a:solidFill>
-                  <a:schemeClr val="tx1">
-                    <a:lumMod val="65000"/>
-                    <a:lumOff val="35000"/>
-                  </a:schemeClr>
-                </a:solidFill>
-                <a:round/>
-              </a:ln>
-              <a:effectLst/>
-            </c:spPr>
-          </c:errBars>
-          <c:val>
-            <c:numRef>
-              <c:f>Diabetes!$E$31:$E$35</c:f>
-              <c:numCache>
-                <c:formatCode>0.0%</c:formatCode>
-                <c:ptCount val="5"/>
-                <c:pt idx="0">
-                  <c:v>0.27799400000000002</c:v>
-                </c:pt>
-                <c:pt idx="1">
-                  <c:v>0.29378399999999999</c:v>
-                </c:pt>
-                <c:pt idx="2">
-                  <c:v>0.309083</c:v>
-                </c:pt>
-                <c:pt idx="3">
-                  <c:v>0.31071300000000002</c:v>
-                </c:pt>
-                <c:pt idx="4">
-                  <c:v>0.37396800000000002</c:v>
-                </c:pt>
-              </c:numCache>
-            </c:numRef>
-          </c:val>
-          <c:smooth val="0"/>
-          <c:extLst>
-            <c:ext xmlns:c16="http://schemas.microsoft.com/office/drawing/2014/chart" uri="{C3380CC4-5D6E-409C-BE32-E72D297353CC}">
-              <c16:uniqueId val="{00000001-C217-44D5-9E1B-0E9E99A777F6}"/>
-            </c:ext>
-          </c:extLst>
-        </c:ser>
-        <c:ser>
-          <c:idx val="2"/>
-          <c:order val="2"/>
-          <c:tx>
-            <c:strRef>
-              <c:f>Diabetes!$D$30</c:f>
-              <c:strCache>
-                <c:ptCount val="1"/>
-                <c:pt idx="0">
-                  <c:v>No CKD</c:v>
-                </c:pt>
-              </c:strCache>
-            </c:strRef>
-          </c:tx>
-          <c:spPr>
-            <a:ln w="44450" cap="rnd">
-              <a:solidFill>
-                <a:schemeClr val="accent3"/>
-              </a:solidFill>
-              <a:round/>
-            </a:ln>
-            <a:effectLst/>
-          </c:spPr>
-          <c:marker>
-            <c:symbol val="circle"/>
-            <c:size val="5"/>
-            <c:spPr>
-              <a:solidFill>
-                <a:schemeClr val="accent3"/>
-              </a:solidFill>
-              <a:ln w="9525">
-                <a:solidFill>
-                  <a:schemeClr val="accent3"/>
-                </a:solidFill>
-              </a:ln>
-              <a:effectLst/>
-            </c:spPr>
-          </c:marker>
-          <c:errBars>
-            <c:errDir val="y"/>
-            <c:errBarType val="both"/>
-            <c:errValType val="cust"/>
-            <c:noEndCap val="0"/>
-            <c:plus>
-              <c:numRef>
-                <c:f>Diabetes!$J$19:$J$23</c:f>
-                <c:numCache>
-                  <c:formatCode>General</c:formatCode>
-                  <c:ptCount val="5"/>
-                  <c:pt idx="0">
-                    <c:v>3.7717210000000029E-2</c:v>
-                  </c:pt>
-                  <c:pt idx="1">
-                    <c:v>3.4722809999999993E-2</c:v>
-                  </c:pt>
-                  <c:pt idx="2">
-                    <c:v>2.7001529999999996E-2</c:v>
-                  </c:pt>
-                  <c:pt idx="3">
-                    <c:v>3.0475780000000008E-2</c:v>
-                  </c:pt>
-                  <c:pt idx="4">
-                    <c:v>3.0032230000000049E-2</c:v>
-                  </c:pt>
-                </c:numCache>
-              </c:numRef>
-            </c:plus>
-            <c:minus>
-              <c:numRef>
-                <c:f>Diabetes!$K$19:$K$23</c:f>
-                <c:numCache>
-                  <c:formatCode>General</c:formatCode>
-                  <c:ptCount val="5"/>
-                  <c:pt idx="0">
-                    <c:v>3.7717489999999965E-2</c:v>
-                  </c:pt>
-                  <c:pt idx="1">
-                    <c:v>3.4721920000000017E-2</c:v>
-                  </c:pt>
-                  <c:pt idx="2">
-                    <c:v>2.7000880000000005E-2</c:v>
-                  </c:pt>
-                  <c:pt idx="3">
-                    <c:v>3.0475780000000008E-2</c:v>
-                  </c:pt>
-                  <c:pt idx="4">
-                    <c:v>3.0032179999999964E-2</c:v>
-                  </c:pt>
-                </c:numCache>
-              </c:numRef>
-            </c:minus>
-            <c:spPr>
-              <a:noFill/>
-              <a:ln w="9525" cap="flat" cmpd="sng" algn="ctr">
-                <a:solidFill>
-                  <a:schemeClr val="tx1">
-                    <a:lumMod val="65000"/>
-                    <a:lumOff val="35000"/>
-                  </a:schemeClr>
-                </a:solidFill>
-                <a:round/>
-              </a:ln>
-              <a:effectLst/>
-            </c:spPr>
-          </c:errBars>
-          <c:val>
-            <c:numRef>
-              <c:f>Diabetes!$D$31:$D$35</c:f>
-              <c:numCache>
-                <c:formatCode>0.0%</c:formatCode>
-                <c:ptCount val="5"/>
-                <c:pt idx="0">
-                  <c:v>6.1162000000000001E-2</c:v>
-                </c:pt>
-                <c:pt idx="1">
-                  <c:v>7.3346999999999996E-2</c:v>
-                </c:pt>
-                <c:pt idx="2">
-                  <c:v>8.3376000000000006E-2</c:v>
-                </c:pt>
-                <c:pt idx="3">
-                  <c:v>9.6495999999999998E-2</c:v>
-                </c:pt>
-                <c:pt idx="4">
-                  <c:v>0.102933</c:v>
-                </c:pt>
-              </c:numCache>
-            </c:numRef>
-          </c:val>
-          <c:smooth val="0"/>
-          <c:extLst>
-            <c:ext xmlns:c16="http://schemas.microsoft.com/office/drawing/2014/chart" uri="{C3380CC4-5D6E-409C-BE32-E72D297353CC}">
-              <c16:uniqueId val="{00000002-C217-44D5-9E1B-0E9E99A777F6}"/>
             </c:ext>
           </c:extLst>
         </c:ser>
@@ -669,8 +669,8 @@
                   </a:defRPr>
                 </a:pPr>
                 <a:r>
-                  <a:rPr lang="en-US"/>
-                  <a:t>% Diabetes</a:t>
+                  <a:rPr lang="en-US" dirty="0"/>
+                  <a:t>Diabetes (%)</a:t>
                 </a:r>
               </a:p>
             </c:rich>
@@ -828,8 +828,280 @@
         <c:grouping val="standard"/>
         <c:varyColors val="0"/>
         <c:ser>
+          <c:idx val="1"/>
+          <c:order val="0"/>
+          <c:tx>
+            <c:strRef>
+              <c:f>'Diabetes (Age Std)'!$E$30</c:f>
+              <c:strCache>
+                <c:ptCount val="1"/>
+                <c:pt idx="0">
+                  <c:v>With CKD</c:v>
+                </c:pt>
+              </c:strCache>
+            </c:strRef>
+          </c:tx>
+          <c:spPr>
+            <a:ln w="44450" cap="rnd">
+              <a:solidFill>
+                <a:schemeClr val="accent2"/>
+              </a:solidFill>
+              <a:round/>
+            </a:ln>
+            <a:effectLst/>
+          </c:spPr>
+          <c:marker>
+            <c:symbol val="circle"/>
+            <c:size val="5"/>
+            <c:spPr>
+              <a:solidFill>
+                <a:schemeClr val="accent2"/>
+              </a:solidFill>
+              <a:ln w="9525">
+                <a:solidFill>
+                  <a:schemeClr val="accent2"/>
+                </a:solidFill>
+              </a:ln>
+              <a:effectLst/>
+            </c:spPr>
+          </c:marker>
+          <c:errBars>
+            <c:errDir val="y"/>
+            <c:errBarType val="both"/>
+            <c:errValType val="cust"/>
+            <c:noEndCap val="0"/>
+            <c:plus>
+              <c:numRef>
+                <c:f>'Diabetes (Age Std)'!$J$14:$J$18</c:f>
+                <c:numCache>
+                  <c:formatCode>General</c:formatCode>
+                  <c:ptCount val="5"/>
+                  <c:pt idx="0">
+                    <c:v>6.9007700000000005E-3</c:v>
+                  </c:pt>
+                  <c:pt idx="1">
+                    <c:v>8.8498800000000044E-3</c:v>
+                  </c:pt>
+                  <c:pt idx="2">
+                    <c:v>7.3518399999999984E-3</c:v>
+                  </c:pt>
+                  <c:pt idx="3">
+                    <c:v>9.7396600000000111E-3</c:v>
+                  </c:pt>
+                  <c:pt idx="4">
+                    <c:v>8.2320000000000032E-3</c:v>
+                  </c:pt>
+                </c:numCache>
+              </c:numRef>
+            </c:plus>
+            <c:minus>
+              <c:numRef>
+                <c:f>'Diabetes (Age Std)'!$K$14:$K$18</c:f>
+                <c:numCache>
+                  <c:formatCode>General</c:formatCode>
+                  <c:ptCount val="5"/>
+                  <c:pt idx="0">
+                    <c:v>6.8998399999999904E-3</c:v>
+                  </c:pt>
+                  <c:pt idx="1">
+                    <c:v>8.8506299999999982E-3</c:v>
+                  </c:pt>
+                  <c:pt idx="2">
+                    <c:v>7.3513099999999998E-3</c:v>
+                  </c:pt>
+                  <c:pt idx="3">
+                    <c:v>9.7396800000000006E-3</c:v>
+                  </c:pt>
+                  <c:pt idx="4">
+                    <c:v>8.232070000000008E-3</c:v>
+                  </c:pt>
+                </c:numCache>
+              </c:numRef>
+            </c:minus>
+            <c:spPr>
+              <a:noFill/>
+              <a:ln w="9525" cap="flat" cmpd="sng" algn="ctr">
+                <a:solidFill>
+                  <a:schemeClr val="tx1">
+                    <a:lumMod val="65000"/>
+                    <a:lumOff val="35000"/>
+                  </a:schemeClr>
+                </a:solidFill>
+                <a:round/>
+              </a:ln>
+              <a:effectLst/>
+            </c:spPr>
+          </c:errBars>
+          <c:val>
+            <c:numRef>
+              <c:f>'Diabetes (Age Std)'!$E$31:$E$35</c:f>
+              <c:numCache>
+                <c:formatCode>0.0%</c:formatCode>
+                <c:ptCount val="5"/>
+                <c:pt idx="0">
+                  <c:v>0.25596400000000002</c:v>
+                </c:pt>
+                <c:pt idx="1">
+                  <c:v>0.26186900000000002</c:v>
+                </c:pt>
+                <c:pt idx="2">
+                  <c:v>0.246532</c:v>
+                </c:pt>
+                <c:pt idx="3">
+                  <c:v>0.256191</c:v>
+                </c:pt>
+                <c:pt idx="4">
+                  <c:v>0.32167800000000002</c:v>
+                </c:pt>
+              </c:numCache>
+            </c:numRef>
+          </c:val>
+          <c:smooth val="0"/>
+          <c:extLst>
+            <c:ext xmlns:c16="http://schemas.microsoft.com/office/drawing/2014/chart" uri="{C3380CC4-5D6E-409C-BE32-E72D297353CC}">
+              <c16:uniqueId val="{00000001-F15A-4027-AAC0-A714F00A20D0}"/>
+            </c:ext>
+          </c:extLst>
+        </c:ser>
+        <c:ser>
+          <c:idx val="2"/>
+          <c:order val="1"/>
+          <c:tx>
+            <c:strRef>
+              <c:f>'Diabetes (Age Std)'!$D$30</c:f>
+              <c:strCache>
+                <c:ptCount val="1"/>
+                <c:pt idx="0">
+                  <c:v>Without CKD</c:v>
+                </c:pt>
+              </c:strCache>
+            </c:strRef>
+          </c:tx>
+          <c:spPr>
+            <a:ln w="44450" cap="rnd">
+              <a:solidFill>
+                <a:schemeClr val="accent3"/>
+              </a:solidFill>
+              <a:round/>
+            </a:ln>
+            <a:effectLst/>
+          </c:spPr>
+          <c:marker>
+            <c:symbol val="circle"/>
+            <c:size val="5"/>
+            <c:spPr>
+              <a:solidFill>
+                <a:schemeClr val="accent3"/>
+              </a:solidFill>
+              <a:ln w="9525">
+                <a:solidFill>
+                  <a:schemeClr val="accent3"/>
+                </a:solidFill>
+              </a:ln>
+              <a:effectLst/>
+            </c:spPr>
+          </c:marker>
+          <c:errBars>
+            <c:errDir val="y"/>
+            <c:errBarType val="both"/>
+            <c:errValType val="cust"/>
+            <c:noEndCap val="0"/>
+            <c:plus>
+              <c:numRef>
+                <c:f>'Diabetes (Age Std)'!$J$19:$J$23</c:f>
+                <c:numCache>
+                  <c:formatCode>General</c:formatCode>
+                  <c:ptCount val="5"/>
+                  <c:pt idx="0">
+                    <c:v>4.7029090000000023E-2</c:v>
+                  </c:pt>
+                  <c:pt idx="1">
+                    <c:v>3.9695920000000023E-2</c:v>
+                  </c:pt>
+                  <c:pt idx="2">
+                    <c:v>2.835776000000001E-2</c:v>
+                  </c:pt>
+                  <c:pt idx="3">
+                    <c:v>3.2299880000000003E-2</c:v>
+                  </c:pt>
+                  <c:pt idx="4">
+                    <c:v>4.7149130000000039E-2</c:v>
+                  </c:pt>
+                </c:numCache>
+              </c:numRef>
+            </c:plus>
+            <c:minus>
+              <c:numRef>
+                <c:f>'Diabetes (Age Std)'!$K$19:$K$23</c:f>
+                <c:numCache>
+                  <c:formatCode>General</c:formatCode>
+                  <c:ptCount val="5"/>
+                  <c:pt idx="0">
+                    <c:v>4.7029589999999954E-2</c:v>
+                  </c:pt>
+                  <c:pt idx="1">
+                    <c:v>3.9695879999999961E-2</c:v>
+                  </c:pt>
+                  <c:pt idx="2">
+                    <c:v>2.8357839999999995E-2</c:v>
+                  </c:pt>
+                  <c:pt idx="3">
+                    <c:v>3.2299059999999991E-2</c:v>
+                  </c:pt>
+                  <c:pt idx="4">
+                    <c:v>4.7149300000000005E-2</c:v>
+                  </c:pt>
+                </c:numCache>
+              </c:numRef>
+            </c:minus>
+            <c:spPr>
+              <a:noFill/>
+              <a:ln w="9525" cap="flat" cmpd="sng" algn="ctr">
+                <a:solidFill>
+                  <a:schemeClr val="tx1">
+                    <a:lumMod val="65000"/>
+                    <a:lumOff val="35000"/>
+                  </a:schemeClr>
+                </a:solidFill>
+                <a:round/>
+              </a:ln>
+              <a:effectLst/>
+            </c:spPr>
+          </c:errBars>
+          <c:val>
+            <c:numRef>
+              <c:f>'Diabetes (Age Std)'!$D$31:$D$35</c:f>
+              <c:numCache>
+                <c:formatCode>0.0%</c:formatCode>
+                <c:ptCount val="5"/>
+                <c:pt idx="0">
+                  <c:v>7.1512000000000006E-2</c:v>
+                </c:pt>
+                <c:pt idx="1">
+                  <c:v>8.1308000000000005E-2</c:v>
+                </c:pt>
+                <c:pt idx="2">
+                  <c:v>8.9922000000000002E-2</c:v>
+                </c:pt>
+                <c:pt idx="3">
+                  <c:v>0.10108300000000001</c:v>
+                </c:pt>
+                <c:pt idx="4">
+                  <c:v>0.107389</c:v>
+                </c:pt>
+              </c:numCache>
+            </c:numRef>
+          </c:val>
+          <c:smooth val="0"/>
+          <c:extLst>
+            <c:ext xmlns:c16="http://schemas.microsoft.com/office/drawing/2014/chart" uri="{C3380CC4-5D6E-409C-BE32-E72D297353CC}">
+              <c16:uniqueId val="{00000002-F15A-4027-AAC0-A714F00A20D0}"/>
+            </c:ext>
+          </c:extLst>
+        </c:ser>
+        <c:ser>
           <c:idx val="0"/>
-          <c:order val="0"/>
+          <c:order val="2"/>
           <c:tx>
             <c:strRef>
               <c:f>'Diabetes (Age Std)'!$C$30</c:f>
@@ -984,278 +1256,6 @@
           <c:extLst>
             <c:ext xmlns:c16="http://schemas.microsoft.com/office/drawing/2014/chart" uri="{C3380CC4-5D6E-409C-BE32-E72D297353CC}">
               <c16:uniqueId val="{00000000-F15A-4027-AAC0-A714F00A20D0}"/>
-            </c:ext>
-          </c:extLst>
-        </c:ser>
-        <c:ser>
-          <c:idx val="1"/>
-          <c:order val="1"/>
-          <c:tx>
-            <c:strRef>
-              <c:f>'Diabetes (Age Std)'!$E$30</c:f>
-              <c:strCache>
-                <c:ptCount val="1"/>
-                <c:pt idx="0">
-                  <c:v>CKD</c:v>
-                </c:pt>
-              </c:strCache>
-            </c:strRef>
-          </c:tx>
-          <c:spPr>
-            <a:ln w="44450" cap="rnd">
-              <a:solidFill>
-                <a:schemeClr val="accent2"/>
-              </a:solidFill>
-              <a:round/>
-            </a:ln>
-            <a:effectLst/>
-          </c:spPr>
-          <c:marker>
-            <c:symbol val="circle"/>
-            <c:size val="5"/>
-            <c:spPr>
-              <a:solidFill>
-                <a:schemeClr val="accent2"/>
-              </a:solidFill>
-              <a:ln w="9525">
-                <a:solidFill>
-                  <a:schemeClr val="accent2"/>
-                </a:solidFill>
-              </a:ln>
-              <a:effectLst/>
-            </c:spPr>
-          </c:marker>
-          <c:errBars>
-            <c:errDir val="y"/>
-            <c:errBarType val="both"/>
-            <c:errValType val="cust"/>
-            <c:noEndCap val="0"/>
-            <c:plus>
-              <c:numRef>
-                <c:f>'Diabetes (Age Std)'!$J$14:$J$18</c:f>
-                <c:numCache>
-                  <c:formatCode>General</c:formatCode>
-                  <c:ptCount val="5"/>
-                  <c:pt idx="0">
-                    <c:v>6.9007700000000005E-3</c:v>
-                  </c:pt>
-                  <c:pt idx="1">
-                    <c:v>8.8498800000000044E-3</c:v>
-                  </c:pt>
-                  <c:pt idx="2">
-                    <c:v>7.3518399999999984E-3</c:v>
-                  </c:pt>
-                  <c:pt idx="3">
-                    <c:v>9.7396600000000111E-3</c:v>
-                  </c:pt>
-                  <c:pt idx="4">
-                    <c:v>8.2320000000000032E-3</c:v>
-                  </c:pt>
-                </c:numCache>
-              </c:numRef>
-            </c:plus>
-            <c:minus>
-              <c:numRef>
-                <c:f>'Diabetes (Age Std)'!$K$14:$K$18</c:f>
-                <c:numCache>
-                  <c:formatCode>General</c:formatCode>
-                  <c:ptCount val="5"/>
-                  <c:pt idx="0">
-                    <c:v>6.8998399999999904E-3</c:v>
-                  </c:pt>
-                  <c:pt idx="1">
-                    <c:v>8.8506299999999982E-3</c:v>
-                  </c:pt>
-                  <c:pt idx="2">
-                    <c:v>7.3513099999999998E-3</c:v>
-                  </c:pt>
-                  <c:pt idx="3">
-                    <c:v>9.7396800000000006E-3</c:v>
-                  </c:pt>
-                  <c:pt idx="4">
-                    <c:v>8.232070000000008E-3</c:v>
-                  </c:pt>
-                </c:numCache>
-              </c:numRef>
-            </c:minus>
-            <c:spPr>
-              <a:noFill/>
-              <a:ln w="9525" cap="flat" cmpd="sng" algn="ctr">
-                <a:solidFill>
-                  <a:schemeClr val="tx1">
-                    <a:lumMod val="65000"/>
-                    <a:lumOff val="35000"/>
-                  </a:schemeClr>
-                </a:solidFill>
-                <a:round/>
-              </a:ln>
-              <a:effectLst/>
-            </c:spPr>
-          </c:errBars>
-          <c:val>
-            <c:numRef>
-              <c:f>'Diabetes (Age Std)'!$E$31:$E$35</c:f>
-              <c:numCache>
-                <c:formatCode>0.0%</c:formatCode>
-                <c:ptCount val="5"/>
-                <c:pt idx="0">
-                  <c:v>0.25596400000000002</c:v>
-                </c:pt>
-                <c:pt idx="1">
-                  <c:v>0.26186900000000002</c:v>
-                </c:pt>
-                <c:pt idx="2">
-                  <c:v>0.246532</c:v>
-                </c:pt>
-                <c:pt idx="3">
-                  <c:v>0.256191</c:v>
-                </c:pt>
-                <c:pt idx="4">
-                  <c:v>0.32167800000000002</c:v>
-                </c:pt>
-              </c:numCache>
-            </c:numRef>
-          </c:val>
-          <c:smooth val="0"/>
-          <c:extLst>
-            <c:ext xmlns:c16="http://schemas.microsoft.com/office/drawing/2014/chart" uri="{C3380CC4-5D6E-409C-BE32-E72D297353CC}">
-              <c16:uniqueId val="{00000001-F15A-4027-AAC0-A714F00A20D0}"/>
-            </c:ext>
-          </c:extLst>
-        </c:ser>
-        <c:ser>
-          <c:idx val="2"/>
-          <c:order val="2"/>
-          <c:tx>
-            <c:strRef>
-              <c:f>'Diabetes (Age Std)'!$D$30</c:f>
-              <c:strCache>
-                <c:ptCount val="1"/>
-                <c:pt idx="0">
-                  <c:v>No CKD</c:v>
-                </c:pt>
-              </c:strCache>
-            </c:strRef>
-          </c:tx>
-          <c:spPr>
-            <a:ln w="44450" cap="rnd">
-              <a:solidFill>
-                <a:schemeClr val="accent3"/>
-              </a:solidFill>
-              <a:round/>
-            </a:ln>
-            <a:effectLst/>
-          </c:spPr>
-          <c:marker>
-            <c:symbol val="circle"/>
-            <c:size val="5"/>
-            <c:spPr>
-              <a:solidFill>
-                <a:schemeClr val="accent3"/>
-              </a:solidFill>
-              <a:ln w="9525">
-                <a:solidFill>
-                  <a:schemeClr val="accent3"/>
-                </a:solidFill>
-              </a:ln>
-              <a:effectLst/>
-            </c:spPr>
-          </c:marker>
-          <c:errBars>
-            <c:errDir val="y"/>
-            <c:errBarType val="both"/>
-            <c:errValType val="cust"/>
-            <c:noEndCap val="0"/>
-            <c:plus>
-              <c:numRef>
-                <c:f>'Diabetes (Age Std)'!$J$19:$J$23</c:f>
-                <c:numCache>
-                  <c:formatCode>General</c:formatCode>
-                  <c:ptCount val="5"/>
-                  <c:pt idx="0">
-                    <c:v>4.7029090000000023E-2</c:v>
-                  </c:pt>
-                  <c:pt idx="1">
-                    <c:v>3.9695920000000023E-2</c:v>
-                  </c:pt>
-                  <c:pt idx="2">
-                    <c:v>2.835776000000001E-2</c:v>
-                  </c:pt>
-                  <c:pt idx="3">
-                    <c:v>3.2299880000000003E-2</c:v>
-                  </c:pt>
-                  <c:pt idx="4">
-                    <c:v>4.7149130000000039E-2</c:v>
-                  </c:pt>
-                </c:numCache>
-              </c:numRef>
-            </c:plus>
-            <c:minus>
-              <c:numRef>
-                <c:f>'Diabetes (Age Std)'!$K$19:$K$23</c:f>
-                <c:numCache>
-                  <c:formatCode>General</c:formatCode>
-                  <c:ptCount val="5"/>
-                  <c:pt idx="0">
-                    <c:v>4.7029589999999954E-2</c:v>
-                  </c:pt>
-                  <c:pt idx="1">
-                    <c:v>3.9695879999999961E-2</c:v>
-                  </c:pt>
-                  <c:pt idx="2">
-                    <c:v>2.8357839999999995E-2</c:v>
-                  </c:pt>
-                  <c:pt idx="3">
-                    <c:v>3.2299059999999991E-2</c:v>
-                  </c:pt>
-                  <c:pt idx="4">
-                    <c:v>4.7149300000000005E-2</c:v>
-                  </c:pt>
-                </c:numCache>
-              </c:numRef>
-            </c:minus>
-            <c:spPr>
-              <a:noFill/>
-              <a:ln w="9525" cap="flat" cmpd="sng" algn="ctr">
-                <a:solidFill>
-                  <a:schemeClr val="tx1">
-                    <a:lumMod val="65000"/>
-                    <a:lumOff val="35000"/>
-                  </a:schemeClr>
-                </a:solidFill>
-                <a:round/>
-              </a:ln>
-              <a:effectLst/>
-            </c:spPr>
-          </c:errBars>
-          <c:val>
-            <c:numRef>
-              <c:f>'Diabetes (Age Std)'!$D$31:$D$35</c:f>
-              <c:numCache>
-                <c:formatCode>0.0%</c:formatCode>
-                <c:ptCount val="5"/>
-                <c:pt idx="0">
-                  <c:v>7.1512000000000006E-2</c:v>
-                </c:pt>
-                <c:pt idx="1">
-                  <c:v>8.1308000000000005E-2</c:v>
-                </c:pt>
-                <c:pt idx="2">
-                  <c:v>8.9922000000000002E-2</c:v>
-                </c:pt>
-                <c:pt idx="3">
-                  <c:v>0.10108300000000001</c:v>
-                </c:pt>
-                <c:pt idx="4">
-                  <c:v>0.107389</c:v>
-                </c:pt>
-              </c:numCache>
-            </c:numRef>
-          </c:val>
-          <c:smooth val="0"/>
-          <c:extLst>
-            <c:ext xmlns:c16="http://schemas.microsoft.com/office/drawing/2014/chart" uri="{C3380CC4-5D6E-409C-BE32-E72D297353CC}">
-              <c16:uniqueId val="{00000002-F15A-4027-AAC0-A714F00A20D0}"/>
             </c:ext>
           </c:extLst>
         </c:ser>
@@ -1359,8 +1359,8 @@
                   </a:defRPr>
                 </a:pPr>
                 <a:r>
-                  <a:rPr lang="en-US"/>
-                  <a:t>% Diabetes</a:t>
+                  <a:rPr lang="en-US" dirty="0"/>
+                  <a:t>Diabetes (%)</a:t>
                 </a:r>
               </a:p>
             </c:rich>
@@ -1526,7 +1526,7 @@
               <c:strCache>
                 <c:ptCount val="1"/>
                 <c:pt idx="0">
-                  <c:v>18 to 39 years</c:v>
+                  <c:v>18-39 years</c:v>
                 </c:pt>
               </c:strCache>
             </c:strRef>
@@ -1682,7 +1682,7 @@
               <c:strCache>
                 <c:ptCount val="1"/>
                 <c:pt idx="0">
-                  <c:v>40 to 59 years</c:v>
+                  <c:v>40-59 years</c:v>
                 </c:pt>
               </c:strCache>
             </c:strRef>
@@ -1841,7 +1841,7 @@
               <c:strCache>
                 <c:ptCount val="1"/>
                 <c:pt idx="0">
-                  <c:v>60 to 69 years</c:v>
+                  <c:v>60-69 years</c:v>
                 </c:pt>
               </c:strCache>
             </c:strRef>
@@ -2249,9 +2249,14 @@
                   </a:defRPr>
                 </a:pPr>
                 <a:r>
-                  <a:rPr lang="en-US"/>
-                  <a:t>% Diabetes</a:t>
+                  <a:rPr lang="en-US" sz="2400" dirty="0"/>
+                  <a:t>Diabetes among adults</a:t>
                 </a:r>
+                <a:r>
+                  <a:rPr lang="en-US" sz="2400" baseline="0" dirty="0"/>
+                  <a:t> with CKD  (%)</a:t>
+                </a:r>
+                <a:endParaRPr lang="en-US" sz="2400" dirty="0"/>
               </a:p>
             </c:rich>
           </c:tx>
@@ -2824,9 +2829,14 @@
                   </a:defRPr>
                 </a:pPr>
                 <a:r>
-                  <a:rPr lang="en-US"/>
-                  <a:t>% Diabetes</a:t>
+                  <a:rPr lang="en-US" sz="2400" b="0" i="0" baseline="0" dirty="0">
+                    <a:effectLst/>
+                  </a:rPr>
+                  <a:t>Diabetes among adults with CKD  (%)</a:t>
                 </a:r>
+                <a:endParaRPr lang="en-US" sz="2400" dirty="0">
+                  <a:effectLst/>
+                </a:endParaRPr>
               </a:p>
             </c:rich>
           </c:tx>
@@ -2983,8 +2993,326 @@
         <c:grouping val="standard"/>
         <c:varyColors val="0"/>
         <c:ser>
+          <c:idx val="3"/>
+          <c:order val="0"/>
+          <c:tx>
+            <c:strRef>
+              <c:f>'Race Ethnicity'!$K$43</c:f>
+              <c:strCache>
+                <c:ptCount val="1"/>
+                <c:pt idx="0">
+                  <c:v>Non-Hispanic White</c:v>
+                </c:pt>
+              </c:strCache>
+            </c:strRef>
+          </c:tx>
+          <c:spPr>
+            <a:ln w="44450" cap="rnd">
+              <a:solidFill>
+                <a:schemeClr val="accent4"/>
+              </a:solidFill>
+              <a:round/>
+            </a:ln>
+            <a:effectLst/>
+          </c:spPr>
+          <c:marker>
+            <c:symbol val="circle"/>
+            <c:size val="5"/>
+            <c:spPr>
+              <a:solidFill>
+                <a:schemeClr val="accent4"/>
+              </a:solidFill>
+              <a:ln w="9525">
+                <a:solidFill>
+                  <a:schemeClr val="accent4"/>
+                </a:solidFill>
+              </a:ln>
+              <a:effectLst/>
+            </c:spPr>
+          </c:marker>
+          <c:errBars>
+            <c:errDir val="y"/>
+            <c:errBarType val="both"/>
+            <c:errValType val="cust"/>
+            <c:noEndCap val="0"/>
+            <c:plus>
+              <c:numRef>
+                <c:f>'Race Ethnicity'!$R$52:$V$52</c:f>
+                <c:numCache>
+                  <c:formatCode>General</c:formatCode>
+                  <c:ptCount val="5"/>
+                  <c:pt idx="0">
+                    <c:v>4.1931010000000019E-2</c:v>
+                  </c:pt>
+                  <c:pt idx="1">
+                    <c:v>4.7863870000000031E-2</c:v>
+                  </c:pt>
+                  <c:pt idx="2">
+                    <c:v>3.8346710000000006E-2</c:v>
+                  </c:pt>
+                  <c:pt idx="3">
+                    <c:v>3.9028950000000007E-2</c:v>
+                  </c:pt>
+                  <c:pt idx="4">
+                    <c:v>5.521796000000001E-2</c:v>
+                  </c:pt>
+                </c:numCache>
+              </c:numRef>
+            </c:plus>
+            <c:minus>
+              <c:numRef>
+                <c:f>'Race Ethnicity'!$R$43:$V$43</c:f>
+                <c:numCache>
+                  <c:formatCode>General</c:formatCode>
+                  <c:ptCount val="5"/>
+                  <c:pt idx="0">
+                    <c:v>4.1931970000000013E-2</c:v>
+                  </c:pt>
+                  <c:pt idx="1">
+                    <c:v>4.7863059999999985E-2</c:v>
+                  </c:pt>
+                  <c:pt idx="2">
+                    <c:v>3.8346939999999968E-2</c:v>
+                  </c:pt>
+                  <c:pt idx="3">
+                    <c:v>3.9028119999999972E-2</c:v>
+                  </c:pt>
+                  <c:pt idx="4">
+                    <c:v>5.5217450000000001E-2</c:v>
+                  </c:pt>
+                </c:numCache>
+              </c:numRef>
+            </c:minus>
+            <c:spPr>
+              <a:noFill/>
+              <a:ln w="9525" cap="flat" cmpd="sng" algn="ctr">
+                <a:solidFill>
+                  <a:schemeClr val="tx1">
+                    <a:lumMod val="65000"/>
+                    <a:lumOff val="35000"/>
+                  </a:schemeClr>
+                </a:solidFill>
+                <a:round/>
+              </a:ln>
+              <a:effectLst/>
+            </c:spPr>
+          </c:errBars>
+          <c:cat>
+            <c:strRef>
+              <c:f>'Race Ethnicity'!$L$39:$P$39</c:f>
+              <c:strCache>
+                <c:ptCount val="5"/>
+                <c:pt idx="0">
+                  <c:v>2001-2004</c:v>
+                </c:pt>
+                <c:pt idx="1">
+                  <c:v>2005-2008</c:v>
+                </c:pt>
+                <c:pt idx="2">
+                  <c:v>2009-2012</c:v>
+                </c:pt>
+                <c:pt idx="3">
+                  <c:v>2013-2016</c:v>
+                </c:pt>
+                <c:pt idx="4">
+                  <c:v>2017-2020</c:v>
+                </c:pt>
+              </c:strCache>
+            </c:strRef>
+          </c:cat>
+          <c:val>
+            <c:numRef>
+              <c:f>'Race Ethnicity'!$L$43:$P$43</c:f>
+              <c:numCache>
+                <c:formatCode>General</c:formatCode>
+                <c:ptCount val="5"/>
+                <c:pt idx="0">
+                  <c:v>0.23785100000000001</c:v>
+                </c:pt>
+                <c:pt idx="1">
+                  <c:v>0.255519</c:v>
+                </c:pt>
+                <c:pt idx="2">
+                  <c:v>0.25635999999999998</c:v>
+                </c:pt>
+                <c:pt idx="3">
+                  <c:v>0.28241699999999997</c:v>
+                </c:pt>
+                <c:pt idx="4">
+                  <c:v>0.33929999999999999</c:v>
+                </c:pt>
+              </c:numCache>
+            </c:numRef>
+          </c:val>
+          <c:smooth val="0"/>
+          <c:extLst>
+            <c:ext xmlns:c16="http://schemas.microsoft.com/office/drawing/2014/chart" uri="{C3380CC4-5D6E-409C-BE32-E72D297353CC}">
+              <c16:uniqueId val="{00000003-0F94-4C1A-BA2F-E4FB36871BA3}"/>
+            </c:ext>
+          </c:extLst>
+        </c:ser>
+        <c:ser>
+          <c:idx val="1"/>
+          <c:order val="1"/>
+          <c:tx>
+            <c:strRef>
+              <c:f>'Race Ethnicity'!$K$41</c:f>
+              <c:strCache>
+                <c:ptCount val="1"/>
+                <c:pt idx="0">
+                  <c:v>Non-Hispanic Black</c:v>
+                </c:pt>
+              </c:strCache>
+            </c:strRef>
+          </c:tx>
+          <c:spPr>
+            <a:ln w="44450" cap="rnd">
+              <a:solidFill>
+                <a:schemeClr val="accent2"/>
+              </a:solidFill>
+              <a:round/>
+            </a:ln>
+            <a:effectLst/>
+          </c:spPr>
+          <c:marker>
+            <c:symbol val="circle"/>
+            <c:size val="5"/>
+            <c:spPr>
+              <a:solidFill>
+                <a:schemeClr val="accent2"/>
+              </a:solidFill>
+              <a:ln w="9525">
+                <a:solidFill>
+                  <a:schemeClr val="accent2"/>
+                </a:solidFill>
+              </a:ln>
+              <a:effectLst/>
+            </c:spPr>
+          </c:marker>
+          <c:errBars>
+            <c:errDir val="y"/>
+            <c:errBarType val="both"/>
+            <c:errValType val="cust"/>
+            <c:noEndCap val="0"/>
+            <c:plus>
+              <c:numRef>
+                <c:f>'Race Ethnicity'!$R$50:$V$50</c:f>
+                <c:numCache>
+                  <c:formatCode>General</c:formatCode>
+                  <c:ptCount val="5"/>
+                  <c:pt idx="0">
+                    <c:v>4.9361339999999976E-2</c:v>
+                  </c:pt>
+                  <c:pt idx="1">
+                    <c:v>4.8188790000000037E-2</c:v>
+                  </c:pt>
+                  <c:pt idx="2">
+                    <c:v>3.5242620000000002E-2</c:v>
+                  </c:pt>
+                  <c:pt idx="3">
+                    <c:v>2.8285400000000016E-2</c:v>
+                  </c:pt>
+                  <c:pt idx="4">
+                    <c:v>6.6112630000000006E-2</c:v>
+                  </c:pt>
+                </c:numCache>
+              </c:numRef>
+            </c:plus>
+            <c:minus>
+              <c:numRef>
+                <c:f>'Race Ethnicity'!$R$41:$V$41</c:f>
+                <c:numCache>
+                  <c:formatCode>General</c:formatCode>
+                  <c:ptCount val="5"/>
+                  <c:pt idx="0">
+                    <c:v>4.9361990000000022E-2</c:v>
+                  </c:pt>
+                  <c:pt idx="1">
+                    <c:v>4.8189619999999989E-2</c:v>
+                  </c:pt>
+                  <c:pt idx="2">
+                    <c:v>3.5243429999999965E-2</c:v>
+                  </c:pt>
+                  <c:pt idx="3">
+                    <c:v>2.8286309999999981E-2</c:v>
+                  </c:pt>
+                  <c:pt idx="4">
+                    <c:v>6.6112569999999982E-2</c:v>
+                  </c:pt>
+                </c:numCache>
+              </c:numRef>
+            </c:minus>
+            <c:spPr>
+              <a:noFill/>
+              <a:ln w="9525" cap="flat" cmpd="sng" algn="ctr">
+                <a:solidFill>
+                  <a:schemeClr val="tx1">
+                    <a:lumMod val="65000"/>
+                    <a:lumOff val="35000"/>
+                  </a:schemeClr>
+                </a:solidFill>
+                <a:round/>
+              </a:ln>
+              <a:effectLst/>
+            </c:spPr>
+          </c:errBars>
+          <c:cat>
+            <c:strRef>
+              <c:f>'Race Ethnicity'!$L$39:$P$39</c:f>
+              <c:strCache>
+                <c:ptCount val="5"/>
+                <c:pt idx="0">
+                  <c:v>2001-2004</c:v>
+                </c:pt>
+                <c:pt idx="1">
+                  <c:v>2005-2008</c:v>
+                </c:pt>
+                <c:pt idx="2">
+                  <c:v>2009-2012</c:v>
+                </c:pt>
+                <c:pt idx="3">
+                  <c:v>2013-2016</c:v>
+                </c:pt>
+                <c:pt idx="4">
+                  <c:v>2017-2020</c:v>
+                </c:pt>
+              </c:strCache>
+            </c:strRef>
+          </c:cat>
+          <c:val>
+            <c:numRef>
+              <c:f>'Race Ethnicity'!$L$41:$P$41</c:f>
+              <c:numCache>
+                <c:formatCode>General</c:formatCode>
+                <c:ptCount val="5"/>
+                <c:pt idx="0">
+                  <c:v>0.328318</c:v>
+                </c:pt>
+                <c:pt idx="1">
+                  <c:v>0.41464499999999999</c:v>
+                </c:pt>
+                <c:pt idx="2">
+                  <c:v>0.40642099999999998</c:v>
+                </c:pt>
+                <c:pt idx="3">
+                  <c:v>0.36821999999999999</c:v>
+                </c:pt>
+                <c:pt idx="4">
+                  <c:v>0.37987799999999999</c:v>
+                </c:pt>
+              </c:numCache>
+            </c:numRef>
+          </c:val>
+          <c:smooth val="0"/>
+          <c:extLst>
+            <c:ext xmlns:c16="http://schemas.microsoft.com/office/drawing/2014/chart" uri="{C3380CC4-5D6E-409C-BE32-E72D297353CC}">
+              <c16:uniqueId val="{00000001-0F94-4C1A-BA2F-E4FB36871BA3}"/>
+            </c:ext>
+          </c:extLst>
+        </c:ser>
+        <c:ser>
           <c:idx val="0"/>
-          <c:order val="0"/>
+          <c:order val="2"/>
           <c:tx>
             <c:strRef>
               <c:f>'Race Ethnicity'!$K$40</c:f>
@@ -3142,174 +3470,15 @@
           </c:extLst>
         </c:ser>
         <c:ser>
-          <c:idx val="1"/>
-          <c:order val="1"/>
-          <c:tx>
-            <c:strRef>
-              <c:f>'Race Ethnicity'!$K$41</c:f>
-              <c:strCache>
-                <c:ptCount val="1"/>
-                <c:pt idx="0">
-                  <c:v>NH Black</c:v>
-                </c:pt>
-              </c:strCache>
-            </c:strRef>
-          </c:tx>
-          <c:spPr>
-            <a:ln w="44450" cap="rnd">
-              <a:solidFill>
-                <a:schemeClr val="accent2"/>
-              </a:solidFill>
-              <a:round/>
-            </a:ln>
-            <a:effectLst/>
-          </c:spPr>
-          <c:marker>
-            <c:symbol val="circle"/>
-            <c:size val="5"/>
-            <c:spPr>
-              <a:solidFill>
-                <a:schemeClr val="accent2"/>
-              </a:solidFill>
-              <a:ln w="9525">
-                <a:solidFill>
-                  <a:schemeClr val="accent2"/>
-                </a:solidFill>
-              </a:ln>
-              <a:effectLst/>
-            </c:spPr>
-          </c:marker>
-          <c:errBars>
-            <c:errDir val="y"/>
-            <c:errBarType val="both"/>
-            <c:errValType val="cust"/>
-            <c:noEndCap val="0"/>
-            <c:plus>
-              <c:numRef>
-                <c:f>'Race Ethnicity'!$R$50:$V$50</c:f>
-                <c:numCache>
-                  <c:formatCode>General</c:formatCode>
-                  <c:ptCount val="5"/>
-                  <c:pt idx="0">
-                    <c:v>4.9361339999999976E-2</c:v>
-                  </c:pt>
-                  <c:pt idx="1">
-                    <c:v>4.8188790000000037E-2</c:v>
-                  </c:pt>
-                  <c:pt idx="2">
-                    <c:v>3.5242620000000002E-2</c:v>
-                  </c:pt>
-                  <c:pt idx="3">
-                    <c:v>2.8285400000000016E-2</c:v>
-                  </c:pt>
-                  <c:pt idx="4">
-                    <c:v>6.6112630000000006E-2</c:v>
-                  </c:pt>
-                </c:numCache>
-              </c:numRef>
-            </c:plus>
-            <c:minus>
-              <c:numRef>
-                <c:f>'Race Ethnicity'!$R$41:$V$41</c:f>
-                <c:numCache>
-                  <c:formatCode>General</c:formatCode>
-                  <c:ptCount val="5"/>
-                  <c:pt idx="0">
-                    <c:v>4.9361990000000022E-2</c:v>
-                  </c:pt>
-                  <c:pt idx="1">
-                    <c:v>4.8189619999999989E-2</c:v>
-                  </c:pt>
-                  <c:pt idx="2">
-                    <c:v>3.5243429999999965E-2</c:v>
-                  </c:pt>
-                  <c:pt idx="3">
-                    <c:v>2.8286309999999981E-2</c:v>
-                  </c:pt>
-                  <c:pt idx="4">
-                    <c:v>6.6112569999999982E-2</c:v>
-                  </c:pt>
-                </c:numCache>
-              </c:numRef>
-            </c:minus>
-            <c:spPr>
-              <a:noFill/>
-              <a:ln w="9525" cap="flat" cmpd="sng" algn="ctr">
-                <a:solidFill>
-                  <a:schemeClr val="tx1">
-                    <a:lumMod val="65000"/>
-                    <a:lumOff val="35000"/>
-                  </a:schemeClr>
-                </a:solidFill>
-                <a:round/>
-              </a:ln>
-              <a:effectLst/>
-            </c:spPr>
-          </c:errBars>
-          <c:cat>
-            <c:strRef>
-              <c:f>'Race Ethnicity'!$L$39:$P$39</c:f>
-              <c:strCache>
-                <c:ptCount val="5"/>
-                <c:pt idx="0">
-                  <c:v>2001-2004</c:v>
-                </c:pt>
-                <c:pt idx="1">
-                  <c:v>2005-2008</c:v>
-                </c:pt>
-                <c:pt idx="2">
-                  <c:v>2009-2012</c:v>
-                </c:pt>
-                <c:pt idx="3">
-                  <c:v>2013-2016</c:v>
-                </c:pt>
-                <c:pt idx="4">
-                  <c:v>2017-2020</c:v>
-                </c:pt>
-              </c:strCache>
-            </c:strRef>
-          </c:cat>
-          <c:val>
-            <c:numRef>
-              <c:f>'Race Ethnicity'!$L$41:$P$41</c:f>
-              <c:numCache>
-                <c:formatCode>General</c:formatCode>
-                <c:ptCount val="5"/>
-                <c:pt idx="0">
-                  <c:v>0.328318</c:v>
-                </c:pt>
-                <c:pt idx="1">
-                  <c:v>0.41464499999999999</c:v>
-                </c:pt>
-                <c:pt idx="2">
-                  <c:v>0.40642099999999998</c:v>
-                </c:pt>
-                <c:pt idx="3">
-                  <c:v>0.36821999999999999</c:v>
-                </c:pt>
-                <c:pt idx="4">
-                  <c:v>0.37987799999999999</c:v>
-                </c:pt>
-              </c:numCache>
-            </c:numRef>
-          </c:val>
-          <c:smooth val="0"/>
-          <c:extLst>
-            <c:ext xmlns:c16="http://schemas.microsoft.com/office/drawing/2014/chart" uri="{C3380CC4-5D6E-409C-BE32-E72D297353CC}">
-              <c16:uniqueId val="{00000001-0F94-4C1A-BA2F-E4FB36871BA3}"/>
-            </c:ext>
-          </c:extLst>
-        </c:ser>
-        <c:ser>
           <c:idx val="2"/>
-          <c:order val="2"/>
+          <c:order val="3"/>
           <c:tx>
             <c:strRef>
               <c:f>'Race Ethnicity'!$K$42</c:f>
               <c:strCache>
                 <c:ptCount val="1"/>
                 <c:pt idx="0">
-                  <c:v>NH Other</c:v>
+                  <c:v>Other</c:v>
                 </c:pt>
               </c:strCache>
             </c:strRef>
@@ -3456,165 +3625,6 @@
           <c:extLst>
             <c:ext xmlns:c16="http://schemas.microsoft.com/office/drawing/2014/chart" uri="{C3380CC4-5D6E-409C-BE32-E72D297353CC}">
               <c16:uniqueId val="{00000002-0F94-4C1A-BA2F-E4FB36871BA3}"/>
-            </c:ext>
-          </c:extLst>
-        </c:ser>
-        <c:ser>
-          <c:idx val="3"/>
-          <c:order val="3"/>
-          <c:tx>
-            <c:strRef>
-              <c:f>'Race Ethnicity'!$K$43</c:f>
-              <c:strCache>
-                <c:ptCount val="1"/>
-                <c:pt idx="0">
-                  <c:v>NH White</c:v>
-                </c:pt>
-              </c:strCache>
-            </c:strRef>
-          </c:tx>
-          <c:spPr>
-            <a:ln w="44450" cap="rnd">
-              <a:solidFill>
-                <a:schemeClr val="accent4"/>
-              </a:solidFill>
-              <a:round/>
-            </a:ln>
-            <a:effectLst/>
-          </c:spPr>
-          <c:marker>
-            <c:symbol val="circle"/>
-            <c:size val="5"/>
-            <c:spPr>
-              <a:solidFill>
-                <a:schemeClr val="accent4"/>
-              </a:solidFill>
-              <a:ln w="9525">
-                <a:solidFill>
-                  <a:schemeClr val="accent4"/>
-                </a:solidFill>
-              </a:ln>
-              <a:effectLst/>
-            </c:spPr>
-          </c:marker>
-          <c:errBars>
-            <c:errDir val="y"/>
-            <c:errBarType val="both"/>
-            <c:errValType val="cust"/>
-            <c:noEndCap val="0"/>
-            <c:plus>
-              <c:numRef>
-                <c:f>'Race Ethnicity'!$R$52:$V$52</c:f>
-                <c:numCache>
-                  <c:formatCode>General</c:formatCode>
-                  <c:ptCount val="5"/>
-                  <c:pt idx="0">
-                    <c:v>4.1931010000000019E-2</c:v>
-                  </c:pt>
-                  <c:pt idx="1">
-                    <c:v>4.7863870000000031E-2</c:v>
-                  </c:pt>
-                  <c:pt idx="2">
-                    <c:v>3.8346710000000006E-2</c:v>
-                  </c:pt>
-                  <c:pt idx="3">
-                    <c:v>3.9028950000000007E-2</c:v>
-                  </c:pt>
-                  <c:pt idx="4">
-                    <c:v>5.521796000000001E-2</c:v>
-                  </c:pt>
-                </c:numCache>
-              </c:numRef>
-            </c:plus>
-            <c:minus>
-              <c:numRef>
-                <c:f>'Race Ethnicity'!$R$43:$V$43</c:f>
-                <c:numCache>
-                  <c:formatCode>General</c:formatCode>
-                  <c:ptCount val="5"/>
-                  <c:pt idx="0">
-                    <c:v>4.1931970000000013E-2</c:v>
-                  </c:pt>
-                  <c:pt idx="1">
-                    <c:v>4.7863059999999985E-2</c:v>
-                  </c:pt>
-                  <c:pt idx="2">
-                    <c:v>3.8346939999999968E-2</c:v>
-                  </c:pt>
-                  <c:pt idx="3">
-                    <c:v>3.9028119999999972E-2</c:v>
-                  </c:pt>
-                  <c:pt idx="4">
-                    <c:v>5.5217450000000001E-2</c:v>
-                  </c:pt>
-                </c:numCache>
-              </c:numRef>
-            </c:minus>
-            <c:spPr>
-              <a:noFill/>
-              <a:ln w="9525" cap="flat" cmpd="sng" algn="ctr">
-                <a:solidFill>
-                  <a:schemeClr val="tx1">
-                    <a:lumMod val="65000"/>
-                    <a:lumOff val="35000"/>
-                  </a:schemeClr>
-                </a:solidFill>
-                <a:round/>
-              </a:ln>
-              <a:effectLst/>
-            </c:spPr>
-          </c:errBars>
-          <c:cat>
-            <c:strRef>
-              <c:f>'Race Ethnicity'!$L$39:$P$39</c:f>
-              <c:strCache>
-                <c:ptCount val="5"/>
-                <c:pt idx="0">
-                  <c:v>2001-2004</c:v>
-                </c:pt>
-                <c:pt idx="1">
-                  <c:v>2005-2008</c:v>
-                </c:pt>
-                <c:pt idx="2">
-                  <c:v>2009-2012</c:v>
-                </c:pt>
-                <c:pt idx="3">
-                  <c:v>2013-2016</c:v>
-                </c:pt>
-                <c:pt idx="4">
-                  <c:v>2017-2020</c:v>
-                </c:pt>
-              </c:strCache>
-            </c:strRef>
-          </c:cat>
-          <c:val>
-            <c:numRef>
-              <c:f>'Race Ethnicity'!$L$43:$P$43</c:f>
-              <c:numCache>
-                <c:formatCode>General</c:formatCode>
-                <c:ptCount val="5"/>
-                <c:pt idx="0">
-                  <c:v>0.23785100000000001</c:v>
-                </c:pt>
-                <c:pt idx="1">
-                  <c:v>0.255519</c:v>
-                </c:pt>
-                <c:pt idx="2">
-                  <c:v>0.25635999999999998</c:v>
-                </c:pt>
-                <c:pt idx="3">
-                  <c:v>0.28241699999999997</c:v>
-                </c:pt>
-                <c:pt idx="4">
-                  <c:v>0.33929999999999999</c:v>
-                </c:pt>
-              </c:numCache>
-            </c:numRef>
-          </c:val>
-          <c:smooth val="0"/>
-          <c:extLst>
-            <c:ext xmlns:c16="http://schemas.microsoft.com/office/drawing/2014/chart" uri="{C3380CC4-5D6E-409C-BE32-E72D297353CC}">
-              <c16:uniqueId val="{00000003-0F94-4C1A-BA2F-E4FB36871BA3}"/>
             </c:ext>
           </c:extLst>
         </c:ser>
@@ -3717,9 +3727,14 @@
                   </a:defRPr>
                 </a:pPr>
                 <a:r>
-                  <a:rPr lang="en-US"/>
-                  <a:t>% Diabetes</a:t>
+                  <a:rPr lang="en-US" sz="2400" b="0" i="0" baseline="0" dirty="0">
+                    <a:effectLst/>
+                  </a:rPr>
+                  <a:t>Diabetes among adults with CKD  (%)</a:t>
                 </a:r>
+                <a:endParaRPr lang="en-US" sz="2400" dirty="0">
+                  <a:effectLst/>
+                </a:endParaRPr>
               </a:p>
             </c:rich>
           </c:tx>
@@ -3783,7 +3798,7 @@
       </c:valAx>
       <c:spPr>
         <a:noFill/>
-        <a:ln>
+        <a:ln w="25400">
           <a:noFill/>
         </a:ln>
         <a:effectLst/>
@@ -6934,7 +6949,7 @@
           <a:p>
             <a:fld id="{CE65F73A-FC44-40AE-A733-4920B7437F4E}" type="datetimeFigureOut">
               <a:rPr lang="en-US" smtClean="0"/>
-              <a:t>9/23/2025</a:t>
+              <a:t>1/15/2026</a:t>
             </a:fld>
             <a:endParaRPr lang="en-US"/>
           </a:p>
@@ -7142,7 +7157,7 @@
           <a:p>
             <a:fld id="{CE65F73A-FC44-40AE-A733-4920B7437F4E}" type="datetimeFigureOut">
               <a:rPr lang="en-US" smtClean="0"/>
-              <a:t>9/23/2025</a:t>
+              <a:t>1/15/2026</a:t>
             </a:fld>
             <a:endParaRPr lang="en-US"/>
           </a:p>
@@ -7351,7 +7366,7 @@
           <a:p>
             <a:fld id="{CE65F73A-FC44-40AE-A733-4920B7437F4E}" type="datetimeFigureOut">
               <a:rPr lang="en-US" smtClean="0"/>
-              <a:t>9/23/2025</a:t>
+              <a:t>1/15/2026</a:t>
             </a:fld>
             <a:endParaRPr lang="en-US"/>
           </a:p>
@@ -7666,7 +7681,7 @@
           <a:p>
             <a:fld id="{CE65F73A-FC44-40AE-A733-4920B7437F4E}" type="datetimeFigureOut">
               <a:rPr lang="en-US" smtClean="0"/>
-              <a:t>9/23/2025</a:t>
+              <a:t>1/15/2026</a:t>
             </a:fld>
             <a:endParaRPr lang="en-US"/>
           </a:p>
@@ -7972,7 +7987,7 @@
           <a:p>
             <a:fld id="{CE65F73A-FC44-40AE-A733-4920B7437F4E}" type="datetimeFigureOut">
               <a:rPr lang="en-US" smtClean="0"/>
-              <a:t>9/23/2025</a:t>
+              <a:t>1/15/2026</a:t>
             </a:fld>
             <a:endParaRPr lang="en-US"/>
           </a:p>
@@ -8420,7 +8435,7 @@
           <a:p>
             <a:fld id="{CE65F73A-FC44-40AE-A733-4920B7437F4E}" type="datetimeFigureOut">
               <a:rPr lang="en-US" smtClean="0"/>
-              <a:t>9/23/2025</a:t>
+              <a:t>1/15/2026</a:t>
             </a:fld>
             <a:endParaRPr lang="en-US"/>
           </a:p>
@@ -8602,7 +8617,7 @@
           <a:p>
             <a:fld id="{CE65F73A-FC44-40AE-A733-4920B7437F4E}" type="datetimeFigureOut">
               <a:rPr lang="en-US" smtClean="0"/>
-              <a:t>9/23/2025</a:t>
+              <a:t>1/15/2026</a:t>
             </a:fld>
             <a:endParaRPr lang="en-US"/>
           </a:p>
@@ -8751,7 +8766,7 @@
           <a:p>
             <a:fld id="{CE65F73A-FC44-40AE-A733-4920B7437F4E}" type="datetimeFigureOut">
               <a:rPr lang="en-US" smtClean="0"/>
-              <a:t>9/23/2025</a:t>
+              <a:t>1/15/2026</a:t>
             </a:fld>
             <a:endParaRPr lang="en-US"/>
           </a:p>
@@ -9099,7 +9114,7 @@
           <a:p>
             <a:fld id="{CE65F73A-FC44-40AE-A733-4920B7437F4E}" type="datetimeFigureOut">
               <a:rPr lang="en-US" smtClean="0"/>
-              <a:t>9/23/2025</a:t>
+              <a:t>1/15/2026</a:t>
             </a:fld>
             <a:endParaRPr lang="en-US"/>
           </a:p>
@@ -9427,7 +9442,7 @@
           <a:p>
             <a:fld id="{CE65F73A-FC44-40AE-A733-4920B7437F4E}" type="datetimeFigureOut">
               <a:rPr lang="en-US" smtClean="0"/>
-              <a:t>9/23/2025</a:t>
+              <a:t>1/15/2026</a:t>
             </a:fld>
             <a:endParaRPr lang="en-US"/>
           </a:p>
@@ -9705,7 +9720,7 @@
           <a:p>
             <a:fld id="{CE65F73A-FC44-40AE-A733-4920B7437F4E}" type="datetimeFigureOut">
               <a:rPr lang="en-US" smtClean="0"/>
-              <a:t>9/23/2025</a:t>
+              <a:t>1/15/2026</a:t>
             </a:fld>
             <a:endParaRPr lang="en-US"/>
           </a:p>
@@ -10198,7 +10213,7 @@
                 <a:ea typeface="Open Sans" panose="020B0606030504020204" pitchFamily="34" charset="0"/>
                 <a:cs typeface="Open Sans" panose="020B0606030504020204" pitchFamily="34" charset="0"/>
               </a:rPr>
-              <a:t>During 2001–March 2020, crude prevalence of diabetes increased from 9.0% to 14.1% in the US adult population. Among adults with CKD the crude and age-adjusted prevalence was on average 3-fold higher than among adults without CKD. During 2017-March 2020, the crude prevalence of diabetes was 37.4% among those with CKD vs. 10.3% among adults without CKD. Among adults with CKD, diabetes prevalence was highest among those aged 60-69 years and males. The lowest prevalence of diabetes was seen among Non-Hispanic White adults with CKD.</a:t>
+              <a:t>During 2001–March 2020, crude prevalence of diabetes increased from 9.0% to 14.1% in the U.S. adult population. Among adults with CKD, the crude and age-adjusted prevalence was on average threefold higher than among adults without CKD. During 2017–March 2020, the crude prevalence of diabetes was 37.4% among adults with CKD vs. 10.3% among adults without CKD. Among adults with CKD, diabetes prevalence (crude) was highest among those aged 60–69 years and males. The lowest prevalence of diabetes was seen among non-Hispanic White adults with CKD.</a:t>
             </a:r>
           </a:p>
           <a:p>
@@ -10346,7 +10361,7 @@
           <a:p>
             <a:r>
               <a:rPr lang="en-US" b="1" dirty="0"/>
-              <a:t>Crude Trends in Prevalence of Diabetes, by CKD</a:t>
+              <a:t>Trends in Prevalence of Diabetes by CKD, Crude</a:t>
             </a:r>
           </a:p>
         </p:txBody>
@@ -10363,7 +10378,13 @@
           <p:cNvGraphicFramePr>
             <a:graphicFrameLocks/>
           </p:cNvGraphicFramePr>
-          <p:nvPr/>
+          <p:nvPr>
+            <p:extLst>
+              <p:ext uri="{D42A27DB-BD31-4B8C-83A1-F6EECF244321}">
+                <p14:modId xmlns:p14="http://schemas.microsoft.com/office/powerpoint/2010/main" val="2616376591"/>
+              </p:ext>
+            </p:extLst>
+          </p:nvPr>
         </p:nvGraphicFramePr>
         <p:xfrm>
           <a:off x="381000" y="1690688"/>
@@ -10429,8 +10450,8 @@
           <a:lstStyle/>
           <a:p>
             <a:r>
-              <a:rPr lang="en-US" b="1"/>
-              <a:t>Age-Standardized Trends in Prevalence of Diabetes, by CKD</a:t>
+              <a:rPr lang="en-US" b="1" dirty="0"/>
+              <a:t>Trends in Prevalence of Diabetes by CKD, Age-Standardized </a:t>
             </a:r>
           </a:p>
         </p:txBody>
@@ -10447,7 +10468,13 @@
           <p:cNvGraphicFramePr>
             <a:graphicFrameLocks/>
           </p:cNvGraphicFramePr>
-          <p:nvPr/>
+          <p:nvPr>
+            <p:extLst>
+              <p:ext uri="{D42A27DB-BD31-4B8C-83A1-F6EECF244321}">
+                <p14:modId xmlns:p14="http://schemas.microsoft.com/office/powerpoint/2010/main" val="3618231786"/>
+              </p:ext>
+            </p:extLst>
+          </p:nvPr>
         </p:nvGraphicFramePr>
         <p:xfrm>
           <a:off x="381000" y="1690688"/>
@@ -10514,7 +10541,7 @@
           <a:p>
             <a:r>
               <a:rPr lang="en-US" b="1" dirty="0"/>
-              <a:t>Crude Trends in Prevalence of Diabetes in Adults with CKD, by Age</a:t>
+              <a:t>Trends in Prevalence of Diabetes in Adults with CKD by Age, Crude</a:t>
             </a:r>
           </a:p>
         </p:txBody>
@@ -10531,7 +10558,13 @@
           <p:cNvGraphicFramePr>
             <a:graphicFrameLocks/>
           </p:cNvGraphicFramePr>
-          <p:nvPr/>
+          <p:nvPr>
+            <p:extLst>
+              <p:ext uri="{D42A27DB-BD31-4B8C-83A1-F6EECF244321}">
+                <p14:modId xmlns:p14="http://schemas.microsoft.com/office/powerpoint/2010/main" val="3978886531"/>
+              </p:ext>
+            </p:extLst>
+          </p:nvPr>
         </p:nvGraphicFramePr>
         <p:xfrm>
           <a:off x="381000" y="1690688"/>
@@ -10632,8 +10665,8 @@
           <a:lstStyle/>
           <a:p>
             <a:r>
-              <a:rPr lang="en-US" b="1"/>
-              <a:t>Crude Trends in Prevalence of Diabetes in Adults with CKD, by Sex</a:t>
+              <a:rPr lang="en-US" b="1" dirty="0"/>
+              <a:t>Trends in Prevalence of Diabetes in Adults with CKD by Sex, Crude</a:t>
             </a:r>
           </a:p>
         </p:txBody>
@@ -10650,7 +10683,13 @@
           <p:cNvGraphicFramePr>
             <a:graphicFrameLocks/>
           </p:cNvGraphicFramePr>
-          <p:nvPr/>
+          <p:nvPr>
+            <p:extLst>
+              <p:ext uri="{D42A27DB-BD31-4B8C-83A1-F6EECF244321}">
+                <p14:modId xmlns:p14="http://schemas.microsoft.com/office/powerpoint/2010/main" val="3042376651"/>
+              </p:ext>
+            </p:extLst>
+          </p:nvPr>
         </p:nvGraphicFramePr>
         <p:xfrm>
           <a:off x="381000" y="1690688"/>
@@ -10716,15 +10755,15 @@
           <a:lstStyle/>
           <a:p>
             <a:r>
-              <a:rPr lang="en-US" sz="4100" b="1"/>
-              <a:t>Crude Trends in Prevalence of Diabetes in Adults </a:t>
+              <a:rPr lang="en-US" sz="4100" b="1" dirty="0"/>
+              <a:t>Trends in Prevalence of Diabetes in Adults </a:t>
             </a:r>
             <a:br>
-              <a:rPr lang="en-US" sz="4100" b="1"/>
+              <a:rPr lang="en-US" sz="4100" b="1" dirty="0"/>
             </a:br>
             <a:r>
-              <a:rPr lang="en-US" sz="4100" b="1"/>
-              <a:t>with CKD, by Race/Ethnicity</a:t>
+              <a:rPr lang="en-US" sz="4100" b="1" dirty="0"/>
+              <a:t>with CKD, by Race/Ethnicity, Crude</a:t>
             </a:r>
           </a:p>
         </p:txBody>
@@ -10741,7 +10780,13 @@
           <p:cNvGraphicFramePr>
             <a:graphicFrameLocks/>
           </p:cNvGraphicFramePr>
-          <p:nvPr/>
+          <p:nvPr>
+            <p:extLst>
+              <p:ext uri="{D42A27DB-BD31-4B8C-83A1-F6EECF244321}">
+                <p14:modId xmlns:p14="http://schemas.microsoft.com/office/powerpoint/2010/main" val="4198114947"/>
+              </p:ext>
+            </p:extLst>
+          </p:nvPr>
         </p:nvGraphicFramePr>
         <p:xfrm>
           <a:off x="381000" y="1690688"/>

--- a/CKDSurveillance/PPT/Q806.pptx
+++ b/CKDSurveillance/PPT/Q806.pptx
@@ -6949,7 +6949,7 @@
           <a:p>
             <a:fld id="{CE65F73A-FC44-40AE-A733-4920B7437F4E}" type="datetimeFigureOut">
               <a:rPr lang="en-US" smtClean="0"/>
-              <a:t>1/15/2026</a:t>
+              <a:t>2/26/2026</a:t>
             </a:fld>
             <a:endParaRPr lang="en-US"/>
           </a:p>
@@ -7157,7 +7157,7 @@
           <a:p>
             <a:fld id="{CE65F73A-FC44-40AE-A733-4920B7437F4E}" type="datetimeFigureOut">
               <a:rPr lang="en-US" smtClean="0"/>
-              <a:t>1/15/2026</a:t>
+              <a:t>2/26/2026</a:t>
             </a:fld>
             <a:endParaRPr lang="en-US"/>
           </a:p>
@@ -7366,7 +7366,7 @@
           <a:p>
             <a:fld id="{CE65F73A-FC44-40AE-A733-4920B7437F4E}" type="datetimeFigureOut">
               <a:rPr lang="en-US" smtClean="0"/>
-              <a:t>1/15/2026</a:t>
+              <a:t>2/26/2026</a:t>
             </a:fld>
             <a:endParaRPr lang="en-US"/>
           </a:p>
@@ -7681,7 +7681,7 @@
           <a:p>
             <a:fld id="{CE65F73A-FC44-40AE-A733-4920B7437F4E}" type="datetimeFigureOut">
               <a:rPr lang="en-US" smtClean="0"/>
-              <a:t>1/15/2026</a:t>
+              <a:t>2/26/2026</a:t>
             </a:fld>
             <a:endParaRPr lang="en-US"/>
           </a:p>
@@ -7987,7 +7987,7 @@
           <a:p>
             <a:fld id="{CE65F73A-FC44-40AE-A733-4920B7437F4E}" type="datetimeFigureOut">
               <a:rPr lang="en-US" smtClean="0"/>
-              <a:t>1/15/2026</a:t>
+              <a:t>2/26/2026</a:t>
             </a:fld>
             <a:endParaRPr lang="en-US"/>
           </a:p>
@@ -8435,7 +8435,7 @@
           <a:p>
             <a:fld id="{CE65F73A-FC44-40AE-A733-4920B7437F4E}" type="datetimeFigureOut">
               <a:rPr lang="en-US" smtClean="0"/>
-              <a:t>1/15/2026</a:t>
+              <a:t>2/26/2026</a:t>
             </a:fld>
             <a:endParaRPr lang="en-US"/>
           </a:p>
@@ -8617,7 +8617,7 @@
           <a:p>
             <a:fld id="{CE65F73A-FC44-40AE-A733-4920B7437F4E}" type="datetimeFigureOut">
               <a:rPr lang="en-US" smtClean="0"/>
-              <a:t>1/15/2026</a:t>
+              <a:t>2/26/2026</a:t>
             </a:fld>
             <a:endParaRPr lang="en-US"/>
           </a:p>
@@ -8766,7 +8766,7 @@
           <a:p>
             <a:fld id="{CE65F73A-FC44-40AE-A733-4920B7437F4E}" type="datetimeFigureOut">
               <a:rPr lang="en-US" smtClean="0"/>
-              <a:t>1/15/2026</a:t>
+              <a:t>2/26/2026</a:t>
             </a:fld>
             <a:endParaRPr lang="en-US"/>
           </a:p>
@@ -9114,7 +9114,7 @@
           <a:p>
             <a:fld id="{CE65F73A-FC44-40AE-A733-4920B7437F4E}" type="datetimeFigureOut">
               <a:rPr lang="en-US" smtClean="0"/>
-              <a:t>1/15/2026</a:t>
+              <a:t>2/26/2026</a:t>
             </a:fld>
             <a:endParaRPr lang="en-US"/>
           </a:p>
@@ -9442,7 +9442,7 @@
           <a:p>
             <a:fld id="{CE65F73A-FC44-40AE-A733-4920B7437F4E}" type="datetimeFigureOut">
               <a:rPr lang="en-US" smtClean="0"/>
-              <a:t>1/15/2026</a:t>
+              <a:t>2/26/2026</a:t>
             </a:fld>
             <a:endParaRPr lang="en-US"/>
           </a:p>
@@ -9720,7 +9720,7 @@
           <a:p>
             <a:fld id="{CE65F73A-FC44-40AE-A733-4920B7437F4E}" type="datetimeFigureOut">
               <a:rPr lang="en-US" smtClean="0"/>
-              <a:t>1/15/2026</a:t>
+              <a:t>2/26/2026</a:t>
             </a:fld>
             <a:endParaRPr lang="en-US"/>
           </a:p>
@@ -10164,11 +10164,7 @@
             </a:br>
             <a:r>
               <a:rPr lang="en-US" sz="4400" b="1" dirty="0"/>
-              <a:t>Trends in Prevalence </a:t>
-            </a:r>
-            <a:r>
-              <a:rPr lang="en-US" sz="4400" b="1"/>
-              <a:t>of Diabetes</a:t>
+              <a:t>Trends in Prevalence of Diabetes by CKD</a:t>
             </a:r>
             <a:br>
               <a:rPr lang="en-US" sz="4400" b="1" dirty="0"/>
@@ -10192,7 +10188,7 @@
         <p:spPr>
           <a:xfrm>
             <a:off x="324665" y="3730371"/>
-            <a:ext cx="11542644" cy="2585323"/>
+            <a:ext cx="11542644" cy="2308324"/>
           </a:xfrm>
           <a:prstGeom prst="rect">
             <a:avLst/>
@@ -10207,13 +10203,22 @@
           <a:p>
             <a:pPr algn="l"/>
             <a:r>
+              <a:rPr lang="en-US" sz="1800">
+                <a:effectLst/>
+                <a:latin typeface="Open Sans" panose="020B0606030504020204" pitchFamily="34" charset="0"/>
+                <a:ea typeface="Open Sans" panose="020B0606030504020204" pitchFamily="34" charset="0"/>
+                <a:cs typeface="Open Sans" panose="020B0606030504020204" pitchFamily="34" charset="0"/>
+              </a:rPr>
+              <a:t>Among </a:t>
+            </a:r>
+            <a:r>
               <a:rPr lang="en-US" sz="1800" dirty="0">
                 <a:effectLst/>
                 <a:latin typeface="Open Sans" panose="020B0606030504020204" pitchFamily="34" charset="0"/>
                 <a:ea typeface="Open Sans" panose="020B0606030504020204" pitchFamily="34" charset="0"/>
                 <a:cs typeface="Open Sans" panose="020B0606030504020204" pitchFamily="34" charset="0"/>
               </a:rPr>
-              <a:t>During 2001–March 2020, crude prevalence of diabetes increased from 9.0% to 14.1% in the U.S. adult population. Among adults with CKD, the crude and age-adjusted prevalence was on average threefold higher than among adults without CKD. During 2017–March 2020, the crude prevalence of diabetes was 37.4% among adults with CKD vs. 10.3% among adults without CKD. Among adults with CKD, diabetes prevalence (crude) was highest among those aged 60–69 years and males. The lowest prevalence of diabetes was seen among non-Hispanic White adults with CKD.</a:t>
+              <a:t>adults with CKD, the crude and age-adjusted prevalence was on average threefold higher than among adults without CKD. During 2017–March 2020, the crude prevalence of diabetes was 37.4% among adults with CKD vs. 10.3% among adults without CKD. Among adults with CKD, diabetes prevalence (crude) was highest among those aged 60–69 years and males. The lowest prevalence of diabetes was seen among non-Hispanic White adults with CKD.</a:t>
             </a:r>
           </a:p>
           <a:p>
